--- a/lecons/LSA/Biogeography/28_LSA_BIO_L25_Nutrient_Cycling_and_Ecosystem_Management.pptx
+++ b/lecons/LSA/Biogeography/28_LSA_BIO_L25_Nutrient_Cycling_and_Ecosystem_Management.pptx
@@ -13243,7 +13243,7 @@
               <a:buNone/>
             </a:pPr>
             <a:r>
-              <a:rPr lang="en-US" sz="4000" b="1" dirty="0">
+              <a:rPr lang="en-US" sz="3200" b="1" dirty="0">
                 <a:solidFill>
                   <a:srgbClr val="111111"/>
                 </a:solidFill>
@@ -13253,7 +13253,7 @@
               </a:rPr>
               <a:t>Topic: Ecological Systems (Ecosystems)</a:t>
             </a:r>
-            <a:endParaRPr lang="en-US" sz="4000" dirty="0"/>
+            <a:endParaRPr lang="en-US" sz="3200" dirty="0"/>
           </a:p>
           <a:p>
             <a:pPr algn="l" indent="0" marL="0">
@@ -13263,7 +13263,7 @@
               <a:buNone/>
             </a:pPr>
             <a:r>
-              <a:rPr lang="en-US" sz="4000" b="1" dirty="0">
+              <a:rPr lang="en-US" sz="3200" b="1" dirty="0">
                 <a:solidFill>
                   <a:srgbClr val="111111"/>
                 </a:solidFill>
@@ -13273,7 +13273,7 @@
               </a:rPr>
               <a:t>Sub-topic: The Functioning of Ecosystems</a:t>
             </a:r>
-            <a:endParaRPr lang="en-US" sz="4000" dirty="0"/>
+            <a:endParaRPr lang="en-US" sz="3200" dirty="0"/>
           </a:p>
           <a:p>
             <a:pPr algn="l" indent="0" marL="0">
@@ -13283,7 +13283,7 @@
               <a:buNone/>
             </a:pPr>
             <a:r>
-              <a:rPr lang="en-US" sz="4000" b="1" dirty="0">
+              <a:rPr lang="en-US" sz="3200" b="1" dirty="0">
                 <a:solidFill>
                   <a:srgbClr val="990011"/>
                 </a:solidFill>
@@ -13293,7 +13293,7 @@
               </a:rPr>
               <a:t>Lesson 25: Nutrient Cycling and Ecosystem Management</a:t>
             </a:r>
-            <a:endParaRPr lang="en-US" sz="4000" dirty="0"/>
+            <a:endParaRPr lang="en-US" sz="3200" dirty="0"/>
           </a:p>
         </p:txBody>
       </p:sp>
